--- a/decks/geog-urban/geog-urban_ch6_bristol-challenges.pptx
+++ b/decks/geog-urban/geog-urban_ch6_bristol-challenges.pptx
@@ -130,31 +130,31 @@
   <p:extLst>
     <p:ext uri="{521415D9-36F7-43E2-AB2F-B90AF26B5E84}">
       <p14:sectionLst xmlns:p14="http://schemas.microsoft.com/office/powerpoint/2010/main">
-        <p14:section name="Opening" id="{e0deb6f3-46f4-35f0-f022-fca7e6c8b205}">
+        <p14:section name="Opening" id="{7e043f13-61a7-80e5-10ee-eccfc9e7b2bd}">
           <p14:sldIdLst>
             <p14:sldId id="256"/>
           </p14:sldIdLst>
         </p14:section>
-        <p14:section name="Gate" id="{2779c55e-02ec-b07e-d25f-ccb914a39d1c}">
+        <p14:section name="Gate" id="{d1e850be-150a-3bae-7992-80b7cd096e12}">
           <p14:sldIdLst>
             <p14:sldId id="257"/>
             <p14:sldId id="258"/>
             <p14:sldId id="259"/>
           </p14:sldIdLst>
         </p14:section>
-        <p14:section name="Pre-teach" id="{23ddd38d-553a-d44f-2b98-03b7748d1efb}">
+        <p14:section name="Pre-teach" id="{06cbcb5d-9c8e-2d16-2208-607207a808da}">
           <p14:sldIdLst>
             <p14:sldId id="260"/>
             <p14:sldId id="261"/>
           </p14:sldIdLst>
         </p14:section>
-        <p14:section name="Read-along" id="{b751deea-0f4c-79b3-680f-2db7e1967b1c}">
+        <p14:section name="Read-along" id="{f2581285-0b7e-8990-b534-a4c1699caf91}">
           <p14:sldIdLst>
             <p14:sldId id="262"/>
             <p14:sldId id="263"/>
           </p14:sldIdLst>
         </p14:section>
-        <p14:section name="Teach" id="{1df19e3d-91eb-defd-e158-d563f4c678e5}">
+        <p14:section name="Teach" id="{95f784d1-c363-d449-38e1-bd7f1c08545d}">
           <p14:sldIdLst>
             <p14:sldId id="264"/>
             <p14:sldId id="265"/>
@@ -163,7 +163,7 @@
             <p14:sldId id="268"/>
           </p14:sldIdLst>
         </p14:section>
-        <p14:section name="Routes" id="{f57696a6-580d-325e-b035-eb48094a0909}">
+        <p14:section name="Routes" id="{a47de007-5ca8-50b3-c070-a0e6f5efbf76}">
           <p14:sldIdLst>
             <p14:sldId id="269"/>
             <p14:sldId id="270"/>
@@ -174,12 +174,12 @@
             <p14:sldId id="275"/>
           </p14:sldIdLst>
         </p14:section>
-        <p14:section name="Close" id="{6bc5be4c-057a-a29a-6d18-3e75ef4b625a}">
+        <p14:section name="Close" id="{234c340f-9984-6d60-780e-1216a0b2dce1}">
           <p14:sldIdLst>
             <p14:sldId id="276"/>
           </p14:sldIdLst>
         </p14:section>
-        <p14:section name="Answers" id="{a2759541-c6f1-672a-c157-404cee556c90}">
+        <p14:section name="Answers" id="{e1642388-1d8a-137e-72e6-3c2bdca7a481}">
           <p14:sldIdLst>
             <p14:sldId id="277"/>
             <p14:sldId id="278"/>
@@ -773,10 +773,10 @@
             <a:r>
               <a:rPr lang="en-US" dirty="0"/>
               <a:t>Teach — New housing: the green belt, greenfield and brownfield. Say it in your own words, then check understanding with a quick question: ask a pupil from the pre-teach group first, since they met these words and ideas before the lesson. Pupils try to recall before you re-explain.
-Where should Bristol's new homes go? Around the edge of the city is the green belt, an area of countryside with strict planning controls to stop houses being built. The Bristol and Bath green belt was set up to prevent the two cities merging and to prevent development on the rural-urban fringe, the zone of transition between the built-up area and the countryside where land uses compete. Even so, Bristol's role as a regional centre has led to the growth of commuter settlements, places where many residents travel into the city to work, to the north and south of the city on the green belt.
+Where should Bristol's new homes go? Around the edge of the city is the green belt, an area of countryside with strict planning controls to stop houses being built. The Bristol and Bath green belt was set up to prevent the two cities merging and to prevent development on the rural-urban fringe, the zone of transition between the built-up area and the countryside where land uses compete. Even so, because Bristol serves such a large region, commuter settlements have grown, places where many residents travel into the city to work, to the north and south of the city on the green belt.
 A greenfield site is a plot of land, often rural or on the edge of a city, that has never been built on before. A national housing shortage has led to greenfield sites being used for new housing, for example at Harry Stoke and Bradley Stoke, but there is considerable opposition. Greenfield sites are cheaper, need no time or money to clear, and can be planned as a whole; but they need new infrastructure such as roads and services, they take open space and countryside, they contribute to urban sprawl and they can lead to piecemeal development.
 A brownfield site is land that has been used, abandoned and now awaits reuse, usually in an urban area: former office buildings, factories, dockyards, pubs, coach depots and listed buildings. Most new homes in Bristol are built on brownfield sites, partly because of the demand for student accommodation; the new flats on Bristol Harbourside are an example. Brownfield sites improve contaminated land and derelict buildings, let people live and work in the city centre and make use of historic buildings; but they may take a lot of time and money to make clear and safe, and old listed buildings may not suit modern use.
-Worked example — model it step by step, thinking aloud: Give one advantage and one disadvantage of building new homes on a brownfield site. (2 marks) (1) Advantage: pick one from the lesson's list, for example it improves contaminated land and derelict buildings. (2) Disadvantage: pick one, for example it may take a lot of time and money to make the site clear and safe. (3) State each in a full sentence; one mark for each. Answer: An advantage is that building on a brownfield site improves contaminated land and derelict buildings, giving them a new use. A disadvantage is that the site may take a lot of time and money to make clear and safe before building can start..
+Worked example — model it step by step, thinking aloud: Give one advantage and one disadvantage of building new homes on a brownfield site. (2 marks) (1) Advantage: pick one from the lesson's list, for example it improves contaminated land and derelict buildings. (2) Disadvantage: pick one, for example clearing a site and making it safe can swallow a great deal of time and money. (3) State each in a full sentence; one mark for each. Answer: An advantage is that building on a brownfield site improves contaminated land and derelict buildings, giving them a new use. A disadvantage is that the site may take a lot of time and money to make clear and safe before building can start..
 Tip: Greenfield: never built on, cheap to start, adds to sprawl. Brownfield: used before, in the city, costly to clear. The advantages of one are the disadvantages of the other.</a:t>
             </a:r>
             <a:endParaRPr lang="en-US" dirty="0"/>
@@ -866,10 +866,10 @@
             <a:r>
               <a:rPr lang="en-US" dirty="0"/>
               <a:t>Teach — New housing: the green belt, greenfield and brownfield. Say it in your own words, then check understanding with a quick question: ask a pupil from the pre-teach group first, since they met these words and ideas before the lesson. Pupils try to recall before you re-explain.
-Where should Bristol's new homes go? Around the edge of the city is the green belt, an area of countryside with strict planning controls to stop houses being built. The Bristol and Bath green belt was set up to prevent the two cities merging and to prevent development on the rural-urban fringe, the zone of transition between the built-up area and the countryside where land uses compete. Even so, Bristol's role as a regional centre has led to the growth of commuter settlements, places where many residents travel into the city to work, to the north and south of the city on the green belt.
+Where should Bristol's new homes go? Around the edge of the city is the green belt, an area of countryside with strict planning controls to stop houses being built. The Bristol and Bath green belt was set up to prevent the two cities merging and to prevent development on the rural-urban fringe, the zone of transition between the built-up area and the countryside where land uses compete. Even so, because Bristol serves such a large region, commuter settlements have grown, places where many residents travel into the city to work, to the north and south of the city on the green belt.
 A greenfield site is a plot of land, often rural or on the edge of a city, that has never been built on before. A national housing shortage has led to greenfield sites being used for new housing, for example at Harry Stoke and Bradley Stoke, but there is considerable opposition. Greenfield sites are cheaper, need no time or money to clear, and can be planned as a whole; but they need new infrastructure such as roads and services, they take open space and countryside, they contribute to urban sprawl and they can lead to piecemeal development.
 A brownfield site is land that has been used, abandoned and now awaits reuse, usually in an urban area: former office buildings, factories, dockyards, pubs, coach depots and listed buildings. Most new homes in Bristol are built on brownfield sites, partly because of the demand for student accommodation; the new flats on Bristol Harbourside are an example. Brownfield sites improve contaminated land and derelict buildings, let people live and work in the city centre and make use of historic buildings; but they may take a lot of time and money to make clear and safe, and old listed buildings may not suit modern use.
-Worked example — model it step by step, thinking aloud: Give one advantage and one disadvantage of building new homes on a brownfield site. (2 marks) (1) Advantage: pick one from the lesson's list, for example it improves contaminated land and derelict buildings. (2) Disadvantage: pick one, for example it may take a lot of time and money to make the site clear and safe. (3) State each in a full sentence; one mark for each. Answer: An advantage is that building on a brownfield site improves contaminated land and derelict buildings, giving them a new use. A disadvantage is that the site may take a lot of time and money to make clear and safe before building can start..
+Worked example — model it step by step, thinking aloud: Give one advantage and one disadvantage of building new homes on a brownfield site. (2 marks) (1) Advantage: pick one from the lesson's list, for example it improves contaminated land and derelict buildings. (2) Disadvantage: pick one, for example clearing a site and making it safe can swallow a great deal of time and money. (3) State each in a full sentence; one mark for each. Answer: An advantage is that building on a brownfield site improves contaminated land and derelict buildings, giving them a new use. A disadvantage is that the site may take a lot of time and money to make clear and safe before building can start..
 Tip: Greenfield: never built on, cheap to start, adds to sprawl. Brownfield: used before, in the city, costly to clear. The advantages of one are the disadvantages of the other.</a:t>
             </a:r>
             <a:endParaRPr lang="en-US" dirty="0"/>
@@ -960,7 +960,7 @@
               <a:rPr lang="en-US" dirty="0"/>
               <a:t>Teach — Regeneration and the Temple Quarter. Say it in your own words, then check understanding with a quick question: ask a pupil from the pre-teach group first, since they met these words and ideas before the lesson. Pupils try to recall before you re-explain.
 Regeneration means improving run-down areas by improving the housing and the environment. It has advantages and disadvantages. On the plus side, multiple land uses can be created from existing buildings; derelict, abandoned or waste land is given a new use; old and shabby urban environments are improved; sprawl is reduced because the site is already developed land; and car use may fall as new buildings go up inside the city. On the minus side, sites are more expensive to build on because the land may need clearing, and the land may have been contaminated by previous industrial use, so it needs professional clean-up.
-Bristol's Temple Quarter needed regeneration for three linked reasons. It was a brownfield site, land previously used for industry, which had grown up around the river, the harbour and the railway station. It is the area most visitors see first when they arrive in Bristol by road or rail. And so it gave a bad image of the city: for people arriving at Bristol's main railway station, Temple Meads, the derelict Temple Quarter was their first impression. The station itself is a historic building linked to the engineer Isambard Kingdom Brunel, and historic buildings shape what a regeneration can do.
+Bristol's Temple Quarter needed regeneration for three linked reasons. It was a brownfield site, land previously used for industry, which had grown up around the river, the harbour and the railway station. It is the area most visitors see first when they arrive in Bristol by road or rail. And so it gave a bad image of the city: visitors arriving at Temple Meads, the city's main railway station, met the derelict Temple Quarter first. The station itself is a historic building linked to the engineer Isambard Kingdom Brunel, and historic buildings shape what a regeneration can do.
 The second Temple Quarter lesson asked you to find examples of a new building and of an old building re-used, to assess the importance of the Bristol arena and Temple Meads station to the project, and to suggest how the success of a regeneration can be measured: new jobs, new homes, visitors, the state of the buildings, and what local people think. Regeneration has winners, such as developers, builders, landowners, investors and the government, and it can have losers, such as local people priced out or moved on; a good evaluation names both.
 Tip: Three reasons the Temple Quarter needed regeneration: brownfield land; the first area visitors see; a bad first impression at Temple Meads.</a:t>
             </a:r>
@@ -2733,7 +2733,7 @@
               <a:rPr lang="en-US" dirty="0"/>
               <a:t>Teach — Dereliction, urban sprawl and a cleaner city. Say it in your own words, then check understanding with a quick question: ask a pupil from the pre-teach group first, since they met these words and ideas before the lesson. Pupils try to recall before you re-explain.
 Changes in Bristol's economy and industry have created two environmental challenges: derelict industrial buildings and urban sprawl. Dereliction means abandoned buildings and wasteland. When the port closed and old industries declined, warehouses and factories in the inner city were left empty. Urban sprawl is the unplanned growth of urban areas into the surrounding rural areas. Bristol's growing population, and the demolition of older slum areas, increased the demand for new homes, and new housing developments have extended the city outwards. One answer has been to build on brownfield sites instead, and Bristol has been successful in using them for new housing to reduce sprawl.
-Bristol is also tackling waste and air pollution. The waste problem is being tackled by reducing the amount of waste generated and sent to landfill, and increasing the amount recycled. Recycling rates have been raised by setting higher targets, educating residents, improving collection services and recycling facilities, and technological improvements. Some waste is handled by resource recovery, also called energy recovery: burning part or all of the waste to generate heat or electricity instead of burying it.
+Bristol is also tackling waste and air pollution. The waste problem is being tackled by reducing the amount of waste generated and sent to landfill, and increasing the amount recycled. Recycling rates have been raised by setting higher targets, teaching residents what belongs in which bin, better collections and facilities, and new technology. Some waste is handled by resource recovery, also called energy recovery: burning part or all of the waste to generate heat or electricity instead of burying it.
 Air pollution, mainly nitrogen dioxide from vehicles, is being reduced by lowering speed limits and encouraging walking, cycling, the use of electric vehicles and public transport. Together these measures let you describe how Bristol is creating a clean environment: less to landfill, more recycling, and fewer emissions from traffic.
 Tip: Urban sprawl has effects on people (longer journeys, loss of countryside for recreation) and on the environment (loss of habitat and farmland, more car travel). Give both in a six-mark answer.</a:t>
             </a:r>
@@ -6233,7 +6233,7 @@
                 <a:ea typeface="Calibri" pitchFamily="34" charset="-122"/>
                 <a:cs typeface="Calibri" pitchFamily="34" charset="-120"/>
               </a:rPr>
-              <a:t>Disadvantage: pick one, for example it may take a lot of time and money to make the site clear and safe.</a:t>
+              <a:t>Disadvantage: pick one, for example clearing a site and making it safe can swallow a great deal of time and money.</a:t>
             </a:r>
             <a:endParaRPr lang="en-US" sz="1800" dirty="0"/>
           </a:p>
